--- a/06-06/06.06-组会报告-刘子豪.pptx
+++ b/06-06/06.06-组会报告-刘子豪.pptx
@@ -3988,7 +3988,7 @@
                 <a:latin typeface="Microsoft YaHei" panose="020B0503020204020204" pitchFamily="34" charset="-122"/>
                 <a:ea typeface="Microsoft YaHei" panose="020B0503020204020204" pitchFamily="34" charset="-122"/>
               </a:rPr>
-              <a:t>—2026</a:t>
+              <a:t>—2026年06月06日—</a:t>
             </a:r>
             <a:r>
               <a:rPr lang="zh-CN" altLang="en-US" b="1" dirty="0">
@@ -4005,7 +4005,7 @@
                 <a:latin typeface="Microsoft YaHei" panose="020B0503020204020204" pitchFamily="34" charset="-122"/>
                 <a:ea typeface="Microsoft YaHei" panose="020B0503020204020204" pitchFamily="34" charset="-122"/>
               </a:rPr>
-              <a:t>年</a:t>
+              <a:t/>
             </a:r>
             <a:r>
               <a:rPr lang="en-US" altLang="zh-CN" b="1" dirty="0">
@@ -4022,7 +4022,7 @@
                 <a:latin typeface="Microsoft YaHei" panose="020B0503020204020204" pitchFamily="34" charset="-122"/>
                 <a:ea typeface="Microsoft YaHei" panose="020B0503020204020204" pitchFamily="34" charset="-122"/>
               </a:rPr>
-              <a:t>06</a:t>
+              <a:t/>
             </a:r>
             <a:r>
               <a:rPr lang="zh-CN" altLang="en-US" b="1" dirty="0">
@@ -4039,7 +4039,7 @@
                 <a:latin typeface="Microsoft YaHei" panose="020B0503020204020204" pitchFamily="34" charset="-122"/>
                 <a:ea typeface="Microsoft YaHei" panose="020B0503020204020204" pitchFamily="34" charset="-122"/>
               </a:rPr>
-              <a:t>月</a:t>
+              <a:t/>
             </a:r>
             <a:r>
               <a:rPr lang="en-US" altLang="zh-CN" b="1" dirty="0">
@@ -4056,7 +4056,7 @@
                 <a:latin typeface="Microsoft YaHei" panose="020B0503020204020204" pitchFamily="34" charset="-122"/>
                 <a:ea typeface="Microsoft YaHei" panose="020B0503020204020204" pitchFamily="34" charset="-122"/>
               </a:rPr>
-              <a:t>06</a:t>
+              <a:t/>
             </a:r>
             <a:r>
               <a:rPr lang="zh-CN" altLang="en-US" b="1" dirty="0">
@@ -4073,7 +4073,7 @@
                 <a:latin typeface="Microsoft YaHei" panose="020B0503020204020204" pitchFamily="34" charset="-122"/>
                 <a:ea typeface="Microsoft YaHei" panose="020B0503020204020204" pitchFamily="34" charset="-122"/>
               </a:rPr>
-              <a:t>日</a:t>
+              <a:t/>
             </a:r>
             <a:r>
               <a:rPr lang="en-US" altLang="zh-CN" b="1" dirty="0">
@@ -4090,7 +4090,7 @@
                 <a:latin typeface="Microsoft YaHei" panose="020B0503020204020204" pitchFamily="34" charset="-122"/>
                 <a:ea typeface="Microsoft YaHei" panose="020B0503020204020204" pitchFamily="34" charset="-122"/>
               </a:rPr>
-              <a:t>—</a:t>
+              <a:t/>
             </a:r>
             <a:endParaRPr lang="zh-CN" altLang="en-US" dirty="0"/>
           </a:p>
